--- a/classes/parte-0-fundamentos-y-prerrequisitos/018-git-y-control-de-versiones-para-profesionales-de-seguridad/clase-018-presentacion.pptx
+++ b/classes/parte-0-fundamentos-y-prerrequisitos/018-git-y-control-de-versiones-para-profesionales-de-seguridad/clase-018-presentacion.pptx
@@ -17,6 +17,11 @@
     <p:sldId id="265" r:id="rId16"/>
     <p:sldId id="266" r:id="rId17"/>
     <p:sldId id="267" r:id="rId18"/>
+    <p:sldId id="268" r:id="rId19"/>
+    <p:sldId id="269" r:id="rId20"/>
+    <p:sldId id="270" r:id="rId21"/>
+    <p:sldId id="271" r:id="rId22"/>
+    <p:sldId id="272" r:id="rId23"/>
   </p:sldIdLst>
   <p:sldSz cx="9144000" cy="6858000" type="screen4x3"/>
   <p:notesSz cx="6858000" cy="9144000"/>
@@ -3198,7 +3203,7 @@
                   <a:srgbClr val="0B3D2E"/>
                 </a:solidFill>
               </a:rPr>
-              <a:t>⚠️ Errores comunes</a:t>
+              <a:t>✍️ Ejercicios</a:t>
             </a:r>
           </a:p>
         </p:txBody>
@@ -3236,67 +3241,82 @@
                   <a:srgbClr val="22282E"/>
                 </a:solidFill>
               </a:rPr>
-              <a:t>•  Secreto ya empujado a remoto — Rotar la credencial de inmediato; reescribir historial no basta si alguien ya lo clonó.</a:t>
-            </a:r>
-          </a:p>
-          <a:p>
-            <a:pPr>
-              <a:spcAft>
-                <a:spcPts val="600"/>
-              </a:spcAft>
-            </a:pPr>
-            <a:r>
-              <a:rPr sz="1500">
-                <a:solidFill>
-                  <a:srgbClr val="22282E"/>
-                </a:solidFill>
-              </a:rPr>
-              <a:t>•  .gitignore no ignora un archivo — Ya estaba rastreado. Ejecuta git rm --cached archivo.</a:t>
-            </a:r>
-          </a:p>
-          <a:p>
-            <a:pPr>
-              <a:spcAft>
-                <a:spcPts val="600"/>
-              </a:spcAft>
-            </a:pPr>
-            <a:r>
-              <a:rPr sz="1500">
-                <a:solidFill>
-                  <a:srgbClr val="22282E"/>
-                </a:solidFill>
-              </a:rPr>
-              <a:t>•  Conflicto de merge sin resolver — Editar los marcadores &lt;&lt;&lt;&lt;&lt;&lt;&lt;, =======, &gt;&gt;&gt;&gt;&gt;&gt;&gt; y hacer commit.</a:t>
-            </a:r>
-          </a:p>
-          <a:p>
-            <a:pPr>
-              <a:spcAft>
-                <a:spcPts val="600"/>
-              </a:spcAft>
-            </a:pPr>
-            <a:r>
-              <a:rPr sz="1500">
-                <a:solidFill>
-                  <a:srgbClr val="22282E"/>
-                </a:solidFill>
-              </a:rPr>
-              <a:t>•  detached HEAD — Hiciste checkout a un commit, no a una rama. Crea una rama desde ahí.</a:t>
-            </a:r>
-          </a:p>
-          <a:p>
-            <a:pPr>
-              <a:spcAft>
-                <a:spcPts val="600"/>
-              </a:spcAft>
-            </a:pPr>
-            <a:r>
-              <a:rPr sz="1500">
-                <a:solidFill>
-                  <a:srgbClr val="22282E"/>
-                </a:solidFill>
-              </a:rPr>
-              <a:t>•  Push rechazado (non-fast-forward) — El remoto avanzó. Haz git pull --rebase y resuelve.</a:t>
+              <a:t>•  Crea, cambia entre y fusiona tres ramas, documentando cada paso con git log --graph --oneline.</a:t>
+            </a:r>
+          </a:p>
+          <a:p>
+            <a:pPr>
+              <a:spcAft>
+                <a:spcPts val="600"/>
+              </a:spcAft>
+            </a:pPr>
+            <a:r>
+              <a:rPr sz="1500">
+                <a:solidFill>
+                  <a:srgbClr val="22282E"/>
+                </a:solidFill>
+              </a:rPr>
+              <a:t>•  Provoca y resuelve un conflicto de merge en un fichero con dos ediciones incompatibles.</a:t>
+            </a:r>
+          </a:p>
+          <a:p>
+            <a:pPr>
+              <a:spcAft>
+                <a:spcPts val="600"/>
+              </a:spcAft>
+            </a:pPr>
+            <a:r>
+              <a:rPr sz="1500">
+                <a:solidFill>
+                  <a:srgbClr val="22282E"/>
+                </a:solidFill>
+              </a:rPr>
+              <a:t>•  Escribe un .gitignore completo para un proyecto Python de seguridad (entornos, claves, artefactos, cachés).</a:t>
+            </a:r>
+          </a:p>
+          <a:p>
+            <a:pPr>
+              <a:spcAft>
+                <a:spcPts val="600"/>
+              </a:spcAft>
+            </a:pPr>
+            <a:r>
+              <a:rPr sz="1500">
+                <a:solidFill>
+                  <a:srgbClr val="22282E"/>
+                </a:solidFill>
+              </a:rPr>
+              <a:t>•  Usa git log, git diff y git blame para investigar quién y cuándo cambió una línea concreta.</a:t>
+            </a:r>
+          </a:p>
+          <a:p>
+            <a:pPr>
+              <a:spcAft>
+                <a:spcPts val="600"/>
+              </a:spcAft>
+            </a:pPr>
+            <a:r>
+              <a:rPr sz="1500">
+                <a:solidFill>
+                  <a:srgbClr val="22282E"/>
+                </a:solidFill>
+              </a:rPr>
+              <a:t>•  Ejecuta gitleaks sobre un repo con un secreto plantado y explica con tus palabras el hallazgo que reporta.</a:t>
+            </a:r>
+          </a:p>
+          <a:p>
+            <a:pPr>
+              <a:spcAft>
+                <a:spcPts val="600"/>
+              </a:spcAft>
+            </a:pPr>
+            <a:r>
+              <a:rPr sz="1500">
+                <a:solidFill>
+                  <a:srgbClr val="22282E"/>
+                </a:solidFill>
+              </a:rPr>
+              <a:t>•  Investiga cómo eliminar un secreto del historial con git filter-repo o BFG, y argumenta por qué además hay que rotar la credencial.</a:t>
             </a:r>
           </a:p>
         </p:txBody>
@@ -3347,7 +3367,7 @@
                   <a:srgbClr val="0B3D2E"/>
                 </a:solidFill>
               </a:rPr>
-              <a:t>❓ Preguntas frecuentes</a:t>
+              <a:t>📝 Reto verificable</a:t>
             </a:r>
           </a:p>
         </p:txBody>
@@ -3385,52 +3405,22 @@
                   <a:srgbClr val="22282E"/>
                 </a:solidFill>
               </a:rPr>
-              <a:t>•  ❓ ¿Por qué es tan grave subir un secreto a Git? Porque el historial es distribuido y persistente: cualquiera que clonara el repo lo tiene, y bots escanean GitHub en segundos. La única respuesta segura es rotar el secreto.</a:t>
-            </a:r>
-          </a:p>
-          <a:p>
-            <a:pPr>
-              <a:spcAft>
-                <a:spcPts val="600"/>
-              </a:spcAft>
-            </a:pPr>
-            <a:r>
-              <a:rPr sz="1500">
-                <a:solidFill>
-                  <a:srgbClr val="22282E"/>
-                </a:solidFill>
-              </a:rPr>
-              <a:t>•  ❓ ¿git rm borra un secreto del historial? No: lo quita del árbol actual, pero sigue en commits anteriores. Hay que reescribir el historial (filter-repo/BFG) y rotar la clave.</a:t>
-            </a:r>
-          </a:p>
-          <a:p>
-            <a:pPr>
-              <a:spcAft>
-                <a:spcPts val="600"/>
-              </a:spcAft>
-            </a:pPr>
-            <a:r>
-              <a:rPr sz="1500">
-                <a:solidFill>
-                  <a:srgbClr val="22282E"/>
-                </a:solidFill>
-              </a:rPr>
-              <a:t>•  ❓ ¿Necesito ramas para trabajar solo? No es obligatorio, pero las ramas te permiten experimentar (por ejemplo, un exploit peligroso) sin ensuciar main. Es buena higiene.</a:t>
-            </a:r>
-          </a:p>
-          <a:p>
-            <a:pPr>
-              <a:spcAft>
-                <a:spcPts val="600"/>
-              </a:spcAft>
-            </a:pPr>
-            <a:r>
-              <a:rPr sz="1500">
-                <a:solidFill>
-                  <a:srgbClr val="22282E"/>
-                </a:solidFill>
-              </a:rPr>
-              <a:t>•  ❓ ¿gitleaks en cada commit? Sí, integrarlo como pre-commit hook evita fugas antes de que ocurran. Prevención mejor que remediación.</a:t>
+              <a:t>•  Crea un repositorio de práctica, simula la fuga de un secreto (clave ficticia) en un commit, detéctalo con gitleaks, y documenta el procedimiento correcto de remediación: rotación de la credencial y…</a:t>
+            </a:r>
+          </a:p>
+          <a:p>
+            <a:pPr>
+              <a:spcAft>
+                <a:spcPts val="600"/>
+              </a:spcAft>
+            </a:pPr>
+            <a:r>
+              <a:rPr sz="1500">
+                <a:solidFill>
+                  <a:srgbClr val="22282E"/>
+                </a:solidFill>
+              </a:rPr>
+              <a:t>•  Criterio de aceptación: gitleaks detecta el secreto plantado en el historial; tu .gitignore incluye el patrón que lo habría bloqueado; y tu documento explica por qué "borrar el fichero en un commit…</a:t>
             </a:r>
           </a:p>
         </p:txBody>
@@ -3481,7 +3471,7 @@
                   <a:srgbClr val="0B3D2E"/>
                 </a:solidFill>
               </a:rPr>
-              <a:t>🔗 Referencias</a:t>
+              <a:t>⚠️ Errores comunes</a:t>
             </a:r>
           </a:p>
         </p:txBody>
@@ -3519,7 +3509,305 @@
                   <a:srgbClr val="22282E"/>
                 </a:solidFill>
               </a:rPr>
-              <a:t>•  Chacon &amp; Straub, Pro Git (gratis) — &lt;https://git-scm.com/book&gt;</a:t>
+              <a:t>•  Secreto ya empujado a un remoto — Rota la credencial de inmediato; reescribir el historial no basta si alguien ya lo clonó.</a:t>
+            </a:r>
+          </a:p>
+          <a:p>
+            <a:pPr>
+              <a:spcAft>
+                <a:spcPts val="600"/>
+              </a:spcAft>
+            </a:pPr>
+            <a:r>
+              <a:rPr sz="1500">
+                <a:solidFill>
+                  <a:srgbClr val="22282E"/>
+                </a:solidFill>
+              </a:rPr>
+              <a:t>•  .gitignore no ignora un fichero — Ya estaba rastreado. Ejecuta git rm --cached fichero y vuelve a confirmar.</a:t>
+            </a:r>
+          </a:p>
+          <a:p>
+            <a:pPr>
+              <a:spcAft>
+                <a:spcPts val="600"/>
+              </a:spcAft>
+            </a:pPr>
+            <a:r>
+              <a:rPr sz="1500">
+                <a:solidFill>
+                  <a:srgbClr val="22282E"/>
+                </a:solidFill>
+              </a:rPr>
+              <a:t>•  Conflicto de merge sin resolver — Edita los marcadores &lt;&lt;&lt;&lt;&lt;&lt;&lt;, =======, &gt;&gt;&gt;&gt;&gt;&gt;&gt;, haz git add y confirma.</a:t>
+            </a:r>
+          </a:p>
+          <a:p>
+            <a:pPr>
+              <a:spcAft>
+                <a:spcPts val="600"/>
+              </a:spcAft>
+            </a:pPr>
+            <a:r>
+              <a:rPr sz="1500">
+                <a:solidFill>
+                  <a:srgbClr val="22282E"/>
+                </a:solidFill>
+              </a:rPr>
+              <a:t>•  detached HEAD — Hiciste checkout a un commit, no a una rama. Crea una rama desde ahí con git switch -c.</a:t>
+            </a:r>
+          </a:p>
+          <a:p>
+            <a:pPr>
+              <a:spcAft>
+                <a:spcPts val="600"/>
+              </a:spcAft>
+            </a:pPr>
+            <a:r>
+              <a:rPr sz="1500">
+                <a:solidFill>
+                  <a:srgbClr val="22282E"/>
+                </a:solidFill>
+              </a:rPr>
+              <a:t>•  Push rechazado (non-fast-forward) — El remoto avanzó. Haz git pull --rebase, resuelve y vuelve a empujar.</a:t>
+            </a:r>
+          </a:p>
+          <a:p>
+            <a:pPr>
+              <a:spcAft>
+                <a:spcPts val="600"/>
+              </a:spcAft>
+            </a:pPr>
+            <a:r>
+              <a:rPr sz="1500">
+                <a:solidFill>
+                  <a:srgbClr val="22282E"/>
+                </a:solidFill>
+              </a:rPr>
+              <a:t>•  gitleaks sigue detectando tras borrar — El secreto persiste en commits anteriores. Reescribe el historial y rota la clave.</a:t>
+            </a:r>
+          </a:p>
+        </p:txBody>
+      </p:sp>
+    </p:spTree>
+  </p:cSld>
+  <p:clrMapOvr>
+    <a:masterClrMapping/>
+  </p:clrMapOvr>
+</p:sld>
+</file>
+
+<file path=ppt/slides/slide13.xml><?xml version="1.0" encoding="utf-8"?>
+<p:sld xmlns:a="http://schemas.openxmlformats.org/drawingml/2006/main" xmlns:p="http://schemas.openxmlformats.org/presentationml/2006/main" xmlns:r="http://schemas.openxmlformats.org/officeDocument/2006/relationships">
+  <p:cSld>
+    <p:spTree>
+      <p:nvGrpSpPr>
+        <p:cNvPr id="1" name=""/>
+        <p:cNvGrpSpPr/>
+        <p:nvPr/>
+      </p:nvGrpSpPr>
+      <p:grpSpPr/>
+      <p:sp>
+        <p:nvSpPr>
+          <p:cNvPr id="2" name="TextBox 1"/>
+          <p:cNvSpPr txBox="1"/>
+          <p:nvPr/>
+        </p:nvSpPr>
+        <p:spPr>
+          <a:xfrm>
+            <a:off x="457200" y="320040"/>
+            <a:ext cx="8229600" cy="822960"/>
+          </a:xfrm>
+          <a:prstGeom prst="rect">
+            <a:avLst/>
+          </a:prstGeom>
+          <a:noFill/>
+        </p:spPr>
+        <p:txBody>
+          <a:bodyPr wrap="square">
+            <a:spAutoFit/>
+          </a:bodyPr>
+          <a:lstStyle/>
+          <a:p>
+            <a:r>
+              <a:rPr sz="2600" b="1">
+                <a:solidFill>
+                  <a:srgbClr val="0B3D2E"/>
+                </a:solidFill>
+              </a:rPr>
+              <a:t>❓ Preguntas frecuentes</a:t>
+            </a:r>
+          </a:p>
+        </p:txBody>
+      </p:sp>
+      <p:sp>
+        <p:nvSpPr>
+          <p:cNvPr id="3" name="TextBox 2"/>
+          <p:cNvSpPr txBox="1"/>
+          <p:nvPr/>
+        </p:nvSpPr>
+        <p:spPr>
+          <a:xfrm>
+            <a:off x="457200" y="1280160"/>
+            <a:ext cx="8229600" cy="4937760"/>
+          </a:xfrm>
+          <a:prstGeom prst="rect">
+            <a:avLst/>
+          </a:prstGeom>
+          <a:noFill/>
+        </p:spPr>
+        <p:txBody>
+          <a:bodyPr wrap="square">
+            <a:spAutoFit/>
+          </a:bodyPr>
+          <a:lstStyle/>
+          <a:p>
+            <a:pPr>
+              <a:spcAft>
+                <a:spcPts val="600"/>
+              </a:spcAft>
+            </a:pPr>
+            <a:r>
+              <a:rPr sz="1500">
+                <a:solidFill>
+                  <a:srgbClr val="22282E"/>
+                </a:solidFill>
+              </a:rPr>
+              <a:t>•  ❓ ¿Por qué es tan grave subir un secreto a Git? Porque el historial es distribuido y persistente: cualquiera que clone el repo se lleva el secreto, y hay bots que escanean GitHub en segundos. La…</a:t>
+            </a:r>
+          </a:p>
+          <a:p>
+            <a:pPr>
+              <a:spcAft>
+                <a:spcPts val="600"/>
+              </a:spcAft>
+            </a:pPr>
+            <a:r>
+              <a:rPr sz="1500">
+                <a:solidFill>
+                  <a:srgbClr val="22282E"/>
+                </a:solidFill>
+              </a:rPr>
+              <a:t>•  ❓ ¿git rm borra un secreto del historial? No: git rm lo quita del árbol actual, pero sigue presente en los commits anteriores. Hay que reescribir el historial (git filter-repo o BFG) y, antes que…</a:t>
+            </a:r>
+          </a:p>
+          <a:p>
+            <a:pPr>
+              <a:spcAft>
+                <a:spcPts val="600"/>
+              </a:spcAft>
+            </a:pPr>
+            <a:r>
+              <a:rPr sz="1500">
+                <a:solidFill>
+                  <a:srgbClr val="22282E"/>
+                </a:solidFill>
+              </a:rPr>
+              <a:t>•  ❓ ¿Necesito ramas si trabajo solo? No es obligatorio, pero las ramas te dejan experimentar con algo peligroso (un exploit, una refactorización) sin ensuciar main. Es buena higiene y prácticamente…</a:t>
+            </a:r>
+          </a:p>
+          <a:p>
+            <a:pPr>
+              <a:spcAft>
+                <a:spcPts val="600"/>
+              </a:spcAft>
+            </a:pPr>
+            <a:r>
+              <a:rPr sz="1500">
+                <a:solidFill>
+                  <a:srgbClr val="22282E"/>
+                </a:solidFill>
+              </a:rPr>
+              <a:t>•  ❓ ¿Debo pasar gitleaks en cada commit? Sí: integrarlo como pre-commit hook evita las fugas antes de que ocurran. La prevención es mucho más barata que la remediación, que implica rotar credenciales y…</a:t>
+            </a:r>
+          </a:p>
+        </p:txBody>
+      </p:sp>
+    </p:spTree>
+  </p:cSld>
+  <p:clrMapOvr>
+    <a:masterClrMapping/>
+  </p:clrMapOvr>
+</p:sld>
+</file>
+
+<file path=ppt/slides/slide14.xml><?xml version="1.0" encoding="utf-8"?>
+<p:sld xmlns:a="http://schemas.openxmlformats.org/drawingml/2006/main" xmlns:p="http://schemas.openxmlformats.org/presentationml/2006/main" xmlns:r="http://schemas.openxmlformats.org/officeDocument/2006/relationships">
+  <p:cSld>
+    <p:spTree>
+      <p:nvGrpSpPr>
+        <p:cNvPr id="1" name=""/>
+        <p:cNvGrpSpPr/>
+        <p:nvPr/>
+      </p:nvGrpSpPr>
+      <p:grpSpPr/>
+      <p:sp>
+        <p:nvSpPr>
+          <p:cNvPr id="2" name="TextBox 1"/>
+          <p:cNvSpPr txBox="1"/>
+          <p:nvPr/>
+        </p:nvSpPr>
+        <p:spPr>
+          <a:xfrm>
+            <a:off x="457200" y="320040"/>
+            <a:ext cx="8229600" cy="822960"/>
+          </a:xfrm>
+          <a:prstGeom prst="rect">
+            <a:avLst/>
+          </a:prstGeom>
+          <a:noFill/>
+        </p:spPr>
+        <p:txBody>
+          <a:bodyPr wrap="square">
+            <a:spAutoFit/>
+          </a:bodyPr>
+          <a:lstStyle/>
+          <a:p>
+            <a:r>
+              <a:rPr sz="2600" b="1">
+                <a:solidFill>
+                  <a:srgbClr val="0B3D2E"/>
+                </a:solidFill>
+              </a:rPr>
+              <a:t>🔗 Referencias</a:t>
+            </a:r>
+          </a:p>
+        </p:txBody>
+      </p:sp>
+      <p:sp>
+        <p:nvSpPr>
+          <p:cNvPr id="3" name="TextBox 2"/>
+          <p:cNvSpPr txBox="1"/>
+          <p:nvPr/>
+        </p:nvSpPr>
+        <p:spPr>
+          <a:xfrm>
+            <a:off x="457200" y="1280160"/>
+            <a:ext cx="8229600" cy="4937760"/>
+          </a:xfrm>
+          <a:prstGeom prst="rect">
+            <a:avLst/>
+          </a:prstGeom>
+          <a:noFill/>
+        </p:spPr>
+        <p:txBody>
+          <a:bodyPr wrap="square">
+            <a:spAutoFit/>
+          </a:bodyPr>
+          <a:lstStyle/>
+          <a:p>
+            <a:pPr>
+              <a:spcAft>
+                <a:spcPts val="600"/>
+              </a:spcAft>
+            </a:pPr>
+            <a:r>
+              <a:rPr sz="1500">
+                <a:solidFill>
+                  <a:srgbClr val="22282E"/>
+                </a:solidFill>
+              </a:rPr>
+              <a:t>•  Chacon &amp; Straub, Pro Git (libro gratuito) — &lt;https://git-scm.com/book&gt;</a:t>
             </a:r>
           </a:p>
           <a:p>
@@ -3549,26 +3837,266 @@
                   <a:srgbClr val="22282E"/>
                 </a:solidFill>
               </a:rPr>
-              <a:t>•  GitHub: Removing sensitive data — &lt;https://docs.github.com/authentication/keeping-your-account-and-data-secure/removing-sensitive-data-from-a-repository&gt;</a:t>
-            </a:r>
-          </a:p>
-          <a:p>
-            <a:pPr>
-              <a:spcAft>
-                <a:spcPts val="600"/>
-              </a:spcAft>
-            </a:pPr>
-            <a:r>
-              <a:rPr sz="1500">
-                <a:solidFill>
-                  <a:srgbClr val="22282E"/>
-                </a:solidFill>
-              </a:rPr>
-              <a:t>•  OWASP: Secrets Management Cheat Sheet — &lt;https://cheatsheetseries.owasp.org/cheatsheets/SecretsManagementCheatSheet.html&gt;</a:t>
-            </a:r>
-          </a:p>
-        </p:txBody>
-      </p:sp>
+              <a:t>•  GitHub, Removing sensitive data from a repository — &lt;https://docs.github.com/authentication/keeping-your-account-and-data-secure/removing-sensitive-data-from-a-repository&gt;</a:t>
+            </a:r>
+          </a:p>
+          <a:p>
+            <a:pPr>
+              <a:spcAft>
+                <a:spcPts val="600"/>
+              </a:spcAft>
+            </a:pPr>
+            <a:r>
+              <a:rPr sz="1500">
+                <a:solidFill>
+                  <a:srgbClr val="22282E"/>
+                </a:solidFill>
+              </a:rPr>
+              <a:t>•  OWASP, Secrets Management Cheat Sheet — &lt;https://cheatsheetseries.owasp.org/cheatsheets/SecretsManagementCheatSheet.html&gt;</a:t>
+            </a:r>
+          </a:p>
+          <a:p>
+            <a:pPr>
+              <a:spcAft>
+                <a:spcPts val="600"/>
+              </a:spcAft>
+            </a:pPr>
+            <a:r>
+              <a:rPr sz="1500">
+                <a:solidFill>
+                  <a:srgbClr val="22282E"/>
+                </a:solidFill>
+              </a:rPr>
+              <a:t>•  NIST SP 800-63B, gestión de credenciales (referencia sobre rotación) — &lt;https://pages.nist.gov/800-63-3/sp800-63b.html&gt;</a:t>
+            </a:r>
+          </a:p>
+        </p:txBody>
+      </p:sp>
+    </p:spTree>
+  </p:cSld>
+  <p:clrMapOvr>
+    <a:masterClrMapping/>
+  </p:clrMapOvr>
+</p:sld>
+</file>
+
+<file path=ppt/slides/slide15.xml><?xml version="1.0" encoding="utf-8"?>
+<p:sld xmlns:a="http://schemas.openxmlformats.org/drawingml/2006/main" xmlns:p="http://schemas.openxmlformats.org/presentationml/2006/main" xmlns:r="http://schemas.openxmlformats.org/officeDocument/2006/relationships">
+  <p:cSld>
+    <p:spTree>
+      <p:nvGrpSpPr>
+        <p:cNvPr id="1" name=""/>
+        <p:cNvGrpSpPr/>
+        <p:nvPr/>
+      </p:nvGrpSpPr>
+      <p:grpSpPr/>
+      <p:sp>
+        <p:nvSpPr>
+          <p:cNvPr id="2" name="TextBox 1"/>
+          <p:cNvSpPr txBox="1"/>
+          <p:nvPr/>
+        </p:nvSpPr>
+        <p:spPr>
+          <a:xfrm>
+            <a:off x="457200" y="274320"/>
+            <a:ext cx="8229600" cy="640080"/>
+          </a:xfrm>
+          <a:prstGeom prst="rect">
+            <a:avLst/>
+          </a:prstGeom>
+          <a:noFill/>
+        </p:spPr>
+        <p:txBody>
+          <a:bodyPr wrap="square">
+            <a:spAutoFit/>
+          </a:bodyPr>
+          <a:lstStyle/>
+          <a:p>
+            <a:r>
+              <a:rPr sz="2200" b="1">
+                <a:solidFill>
+                  <a:srgbClr val="0B3D2E"/>
+                </a:solidFill>
+              </a:rPr>
+              <a:t>Diagrama 1</a:t>
+            </a:r>
+          </a:p>
+        </p:txBody>
+      </p:sp>
+      <p:pic>
+        <p:nvPicPr>
+          <p:cNvPr id="3" name="Picture 2" descr="8efac8b5c2dd338d.png"/>
+          <p:cNvPicPr>
+            <a:picLocks noChangeAspect="1"/>
+          </p:cNvPicPr>
+          <p:nvPr/>
+        </p:nvPicPr>
+        <p:blipFill>
+          <a:blip r:embed="rId2"/>
+          <a:stretch>
+            <a:fillRect/>
+          </a:stretch>
+        </p:blipFill>
+        <p:spPr>
+          <a:xfrm>
+            <a:off x="457200" y="3063240"/>
+            <a:ext cx="8229600" cy="1371600"/>
+          </a:xfrm>
+          <a:prstGeom prst="rect">
+            <a:avLst/>
+          </a:prstGeom>
+        </p:spPr>
+      </p:pic>
+    </p:spTree>
+  </p:cSld>
+  <p:clrMapOvr>
+    <a:masterClrMapping/>
+  </p:clrMapOvr>
+</p:sld>
+</file>
+
+<file path=ppt/slides/slide16.xml><?xml version="1.0" encoding="utf-8"?>
+<p:sld xmlns:a="http://schemas.openxmlformats.org/drawingml/2006/main" xmlns:p="http://schemas.openxmlformats.org/presentationml/2006/main" xmlns:r="http://schemas.openxmlformats.org/officeDocument/2006/relationships">
+  <p:cSld>
+    <p:spTree>
+      <p:nvGrpSpPr>
+        <p:cNvPr id="1" name=""/>
+        <p:cNvGrpSpPr/>
+        <p:nvPr/>
+      </p:nvGrpSpPr>
+      <p:grpSpPr/>
+      <p:sp>
+        <p:nvSpPr>
+          <p:cNvPr id="2" name="TextBox 1"/>
+          <p:cNvSpPr txBox="1"/>
+          <p:nvPr/>
+        </p:nvSpPr>
+        <p:spPr>
+          <a:xfrm>
+            <a:off x="457200" y="274320"/>
+            <a:ext cx="8229600" cy="640080"/>
+          </a:xfrm>
+          <a:prstGeom prst="rect">
+            <a:avLst/>
+          </a:prstGeom>
+          <a:noFill/>
+        </p:spPr>
+        <p:txBody>
+          <a:bodyPr wrap="square">
+            <a:spAutoFit/>
+          </a:bodyPr>
+          <a:lstStyle/>
+          <a:p>
+            <a:r>
+              <a:rPr sz="2200" b="1">
+                <a:solidFill>
+                  <a:srgbClr val="0B3D2E"/>
+                </a:solidFill>
+              </a:rPr>
+              <a:t>Diagrama 2</a:t>
+            </a:r>
+          </a:p>
+        </p:txBody>
+      </p:sp>
+      <p:pic>
+        <p:nvPicPr>
+          <p:cNvPr id="3" name="Picture 2" descr="210eb4d17723e7bf.png"/>
+          <p:cNvPicPr>
+            <a:picLocks noChangeAspect="1"/>
+          </p:cNvPicPr>
+          <p:nvPr/>
+        </p:nvPicPr>
+        <p:blipFill>
+          <a:blip r:embed="rId2"/>
+          <a:stretch>
+            <a:fillRect/>
+          </a:stretch>
+        </p:blipFill>
+        <p:spPr>
+          <a:xfrm>
+            <a:off x="457200" y="3483864"/>
+            <a:ext cx="8229600" cy="530352"/>
+          </a:xfrm>
+          <a:prstGeom prst="rect">
+            <a:avLst/>
+          </a:prstGeom>
+        </p:spPr>
+      </p:pic>
+    </p:spTree>
+  </p:cSld>
+  <p:clrMapOvr>
+    <a:masterClrMapping/>
+  </p:clrMapOvr>
+</p:sld>
+</file>
+
+<file path=ppt/slides/slide17.xml><?xml version="1.0" encoding="utf-8"?>
+<p:sld xmlns:a="http://schemas.openxmlformats.org/drawingml/2006/main" xmlns:p="http://schemas.openxmlformats.org/presentationml/2006/main" xmlns:r="http://schemas.openxmlformats.org/officeDocument/2006/relationships">
+  <p:cSld>
+    <p:spTree>
+      <p:nvGrpSpPr>
+        <p:cNvPr id="1" name=""/>
+        <p:cNvGrpSpPr/>
+        <p:nvPr/>
+      </p:nvGrpSpPr>
+      <p:grpSpPr/>
+      <p:sp>
+        <p:nvSpPr>
+          <p:cNvPr id="2" name="TextBox 1"/>
+          <p:cNvSpPr txBox="1"/>
+          <p:nvPr/>
+        </p:nvSpPr>
+        <p:spPr>
+          <a:xfrm>
+            <a:off x="457200" y="274320"/>
+            <a:ext cx="8229600" cy="640080"/>
+          </a:xfrm>
+          <a:prstGeom prst="rect">
+            <a:avLst/>
+          </a:prstGeom>
+          <a:noFill/>
+        </p:spPr>
+        <p:txBody>
+          <a:bodyPr wrap="square">
+            <a:spAutoFit/>
+          </a:bodyPr>
+          <a:lstStyle/>
+          <a:p>
+            <a:r>
+              <a:rPr sz="2200" b="1">
+                <a:solidFill>
+                  <a:srgbClr val="0B3D2E"/>
+                </a:solidFill>
+              </a:rPr>
+              <a:t>Diagrama 3</a:t>
+            </a:r>
+          </a:p>
+        </p:txBody>
+      </p:sp>
+      <p:pic>
+        <p:nvPicPr>
+          <p:cNvPr id="3" name="Picture 2" descr="f75d60b0af7fd523.png"/>
+          <p:cNvPicPr>
+            <a:picLocks noChangeAspect="1"/>
+          </p:cNvPicPr>
+          <p:nvPr/>
+        </p:nvPicPr>
+        <p:blipFill>
+          <a:blip r:embed="rId2"/>
+          <a:stretch>
+            <a:fillRect/>
+          </a:stretch>
+        </p:blipFill>
+        <p:spPr>
+          <a:xfrm>
+            <a:off x="1306947" y="1097280"/>
+            <a:ext cx="6530105" cy="5303520"/>
+          </a:xfrm>
+          <a:prstGeom prst="rect">
+            <a:avLst/>
+          </a:prstGeom>
+        </p:spPr>
+      </p:pic>
     </p:spTree>
   </p:cSld>
   <p:clrMapOvr>
@@ -3653,7 +4181,7 @@
                   <a:srgbClr val="22282E"/>
                 </a:solidFill>
               </a:rPr>
-              <a:t>•  Usar Git con soltura para versionar herramientas, notas y hallazgos, colaborar y, sobre todo, evitar filtrar secretos en el historial, un error de seguridad extremadamente común. Al terminar manejarás el flujo básico, ramas, resolución de conflictos y prácticas de higiene de secretos.</a:t>
+              <a:t>•  Usar Git con soltura para versionar herramientas, notas y hallazgos, colaborar en equipo y, sobre todo, evitar filtrar secretos en el historial, uno de los errores de seguridad más comunes y más…</a:t>
             </a:r>
           </a:p>
         </p:txBody>
@@ -3757,67 +4285,82 @@
                   <a:srgbClr val="22282E"/>
                 </a:solidFill>
               </a:rPr>
-              <a:t>•  Ejecutar el flujo básico: init, add, commit, log, diff.</a:t>
-            </a:r>
-          </a:p>
-          <a:p>
-            <a:pPr>
-              <a:spcAft>
-                <a:spcPts val="600"/>
-              </a:spcAft>
-            </a:pPr>
-            <a:r>
-              <a:rPr sz="1500">
-                <a:solidFill>
-                  <a:srgbClr val="22282E"/>
-                </a:solidFill>
-              </a:rPr>
-              <a:t>•  Trabajar con ramas, merge y resolución de conflictos.</a:t>
-            </a:r>
-          </a:p>
-          <a:p>
-            <a:pPr>
-              <a:spcAft>
-                <a:spcPts val="600"/>
-              </a:spcAft>
-            </a:pPr>
-            <a:r>
-              <a:rPr sz="1500">
-                <a:solidFill>
-                  <a:srgbClr val="22282E"/>
-                </a:solidFill>
-              </a:rPr>
-              <a:t>•  Sincronizar con repositorios remotos (clone, push, pull).</a:t>
-            </a:r>
-          </a:p>
-          <a:p>
-            <a:pPr>
-              <a:spcAft>
-                <a:spcPts val="600"/>
-              </a:spcAft>
-            </a:pPr>
-            <a:r>
-              <a:rPr sz="1500">
-                <a:solidFill>
-                  <a:srgbClr val="22282E"/>
-                </a:solidFill>
-              </a:rPr>
-              <a:t>•  Prevenir la fuga de secretos con .gitignore y buenas prácticas.</a:t>
-            </a:r>
-          </a:p>
-          <a:p>
-            <a:pPr>
-              <a:spcAft>
-                <a:spcPts val="600"/>
-              </a:spcAft>
-            </a:pPr>
-            <a:r>
-              <a:rPr sz="1500">
-                <a:solidFill>
-                  <a:srgbClr val="22282E"/>
-                </a:solidFill>
-              </a:rPr>
-              <a:t>•  Auditar un repositorio en busca de secretos en el historial.</a:t>
+              <a:t>•  Ejecutar el flujo básico de Git: init, add, commit, log y diff, entendiendo el área de staging.</a:t>
+            </a:r>
+          </a:p>
+          <a:p>
+            <a:pPr>
+              <a:spcAft>
+                <a:spcPts val="600"/>
+              </a:spcAft>
+            </a:pPr>
+            <a:r>
+              <a:rPr sz="1500">
+                <a:solidFill>
+                  <a:srgbClr val="22282E"/>
+                </a:solidFill>
+              </a:rPr>
+              <a:t>•  Trabajar con ramas, fusiones y resolución manual de conflictos.</a:t>
+            </a:r>
+          </a:p>
+          <a:p>
+            <a:pPr>
+              <a:spcAft>
+                <a:spcPts val="600"/>
+              </a:spcAft>
+            </a:pPr>
+            <a:r>
+              <a:rPr sz="1500">
+                <a:solidFill>
+                  <a:srgbClr val="22282E"/>
+                </a:solidFill>
+              </a:rPr>
+              <a:t>•  Sincronizar con repositorios remotos mediante clone, push y pull.</a:t>
+            </a:r>
+          </a:p>
+          <a:p>
+            <a:pPr>
+              <a:spcAft>
+                <a:spcPts val="600"/>
+              </a:spcAft>
+            </a:pPr>
+            <a:r>
+              <a:rPr sz="1500">
+                <a:solidFill>
+                  <a:srgbClr val="22282E"/>
+                </a:solidFill>
+              </a:rPr>
+              <a:t>•  Prevenir la fuga de secretos con .gitignore y buenas prácticas de higiene.</a:t>
+            </a:r>
+          </a:p>
+          <a:p>
+            <a:pPr>
+              <a:spcAft>
+                <a:spcPts val="600"/>
+              </a:spcAft>
+            </a:pPr>
+            <a:r>
+              <a:rPr sz="1500">
+                <a:solidFill>
+                  <a:srgbClr val="22282E"/>
+                </a:solidFill>
+              </a:rPr>
+              <a:t>•  Auditar un repositorio en busca de secretos en todo su historial con herramientas dedicadas.</a:t>
+            </a:r>
+          </a:p>
+          <a:p>
+            <a:pPr>
+              <a:spcAft>
+                <a:spcPts val="600"/>
+              </a:spcAft>
+            </a:pPr>
+            <a:r>
+              <a:rPr sz="1500">
+                <a:solidFill>
+                  <a:srgbClr val="22282E"/>
+                </a:solidFill>
+              </a:rPr>
+              <a:t>•  Explicar el procedimiento correcto de remediación cuando un secreto ya fue empujado.</a:t>
             </a:r>
           </a:p>
         </p:txBody>
@@ -3921,82 +4464,82 @@
                   <a:srgbClr val="22282E"/>
                 </a:solidFill>
               </a:rPr>
-              <a:t>•  2 — Flujo básico</a:t>
-            </a:r>
-          </a:p>
-          <a:p>
-            <a:pPr>
-              <a:spcAft>
-                <a:spcPts val="600"/>
-              </a:spcAft>
-            </a:pPr>
-            <a:r>
-              <a:rPr sz="1500">
-                <a:solidFill>
-                  <a:srgbClr val="22282E"/>
-                </a:solidFill>
-              </a:rPr>
-              <a:t>•  3 — Ramas y merge</a:t>
-            </a:r>
-          </a:p>
-          <a:p>
-            <a:pPr>
-              <a:spcAft>
-                <a:spcPts val="600"/>
-              </a:spcAft>
-            </a:pPr>
-            <a:r>
-              <a:rPr sz="1500">
-                <a:solidFill>
-                  <a:srgbClr val="22282E"/>
-                </a:solidFill>
-              </a:rPr>
-              <a:t>•  4 — Conflictos</a:t>
-            </a:r>
-          </a:p>
-          <a:p>
-            <a:pPr>
-              <a:spcAft>
-                <a:spcPts val="600"/>
-              </a:spcAft>
-            </a:pPr>
-            <a:r>
-              <a:rPr sz="1500">
-                <a:solidFill>
-                  <a:srgbClr val="22282E"/>
-                </a:solidFill>
-              </a:rPr>
-              <a:t>•  5 — Remotos</a:t>
-            </a:r>
-          </a:p>
-          <a:p>
-            <a:pPr>
-              <a:spcAft>
-                <a:spcPts val="600"/>
-              </a:spcAft>
-            </a:pPr>
-            <a:r>
-              <a:rPr sz="1500">
-                <a:solidFill>
-                  <a:srgbClr val="22282E"/>
-                </a:solidFill>
-              </a:rPr>
-              <a:t>•  6 — .gitignore</a:t>
-            </a:r>
-          </a:p>
-          <a:p>
-            <a:pPr>
-              <a:spcAft>
-                <a:spcPts val="600"/>
-              </a:spcAft>
-            </a:pPr>
-            <a:r>
-              <a:rPr sz="1500">
-                <a:solidFill>
-                  <a:srgbClr val="22282E"/>
-                </a:solidFill>
-              </a:rPr>
-              <a:t>•  7 — Secretos en el historial</a:t>
+              <a:t>•  2 — Área de staging</a:t>
+            </a:r>
+          </a:p>
+          <a:p>
+            <a:pPr>
+              <a:spcAft>
+                <a:spcPts val="600"/>
+              </a:spcAft>
+            </a:pPr>
+            <a:r>
+              <a:rPr sz="1500">
+                <a:solidFill>
+                  <a:srgbClr val="22282E"/>
+                </a:solidFill>
+              </a:rPr>
+              <a:t>•  3 — Flujo básico</a:t>
+            </a:r>
+          </a:p>
+          <a:p>
+            <a:pPr>
+              <a:spcAft>
+                <a:spcPts val="600"/>
+              </a:spcAft>
+            </a:pPr>
+            <a:r>
+              <a:rPr sz="1500">
+                <a:solidFill>
+                  <a:srgbClr val="22282E"/>
+                </a:solidFill>
+              </a:rPr>
+              <a:t>•  4 — Ramas y merge</a:t>
+            </a:r>
+          </a:p>
+          <a:p>
+            <a:pPr>
+              <a:spcAft>
+                <a:spcPts val="600"/>
+              </a:spcAft>
+            </a:pPr>
+            <a:r>
+              <a:rPr sz="1500">
+                <a:solidFill>
+                  <a:srgbClr val="22282E"/>
+                </a:solidFill>
+              </a:rPr>
+              <a:t>•  5 — Conflictos</a:t>
+            </a:r>
+          </a:p>
+          <a:p>
+            <a:pPr>
+              <a:spcAft>
+                <a:spcPts val="600"/>
+              </a:spcAft>
+            </a:pPr>
+            <a:r>
+              <a:rPr sz="1500">
+                <a:solidFill>
+                  <a:srgbClr val="22282E"/>
+                </a:solidFill>
+              </a:rPr>
+              <a:t>•  6 — Remotos</a:t>
+            </a:r>
+          </a:p>
+          <a:p>
+            <a:pPr>
+              <a:spcAft>
+                <a:spcPts val="600"/>
+              </a:spcAft>
+            </a:pPr>
+            <a:r>
+              <a:rPr sz="1500">
+                <a:solidFill>
+                  <a:srgbClr val="22282E"/>
+                </a:solidFill>
+              </a:rPr>
+              <a:t>•  7 — .gitignore</a:t>
             </a:r>
           </a:p>
         </p:txBody>
@@ -4047,7 +4590,7 @@
                   <a:srgbClr val="0B3D2E"/>
                 </a:solidFill>
               </a:rPr>
-              <a:t>📖 Definiciones y características</a:t>
+              <a:t>🧠 Explicación en profundidad</a:t>
             </a:r>
           </a:p>
         </p:txBody>
@@ -4085,82 +4628,82 @@
                   <a:srgbClr val="22282E"/>
                 </a:solidFill>
               </a:rPr>
-              <a:t>•  Commit: instantánea del proyecto con un hash único. Clave: Git guarda snapshots completos, no diferencias.</a:t>
-            </a:r>
-          </a:p>
-          <a:p>
-            <a:pPr>
-              <a:spcAft>
-                <a:spcPts val="600"/>
-              </a:spcAft>
-            </a:pPr>
-            <a:r>
-              <a:rPr sz="1500">
-                <a:solidFill>
-                  <a:srgbClr val="22282E"/>
-                </a:solidFill>
-              </a:rPr>
-              <a:t>•  Rama (branch): puntero móvil a una línea de desarrollo. Clave: aísla trabajo sin afectar main.</a:t>
-            </a:r>
-          </a:p>
-          <a:p>
-            <a:pPr>
-              <a:spcAft>
-                <a:spcPts val="600"/>
-              </a:spcAft>
-            </a:pPr>
-            <a:r>
-              <a:rPr sz="1500">
-                <a:solidFill>
-                  <a:srgbClr val="22282E"/>
-                </a:solidFill>
-              </a:rPr>
-              <a:t>•  Merge: integra una rama en otra. Clave: puede generar conflictos que hay que resolver a mano.</a:t>
-            </a:r>
-          </a:p>
-          <a:p>
-            <a:pPr>
-              <a:spcAft>
-                <a:spcPts val="600"/>
-              </a:spcAft>
-            </a:pPr>
-            <a:r>
-              <a:rPr sz="1500">
-                <a:solidFill>
-                  <a:srgbClr val="22282E"/>
-                </a:solidFill>
-              </a:rPr>
-              <a:t>•  .gitignore: lista de rutas que Git no debe rastrear. Clave: primera línea de defensa contra subir secretos/artefactos.</a:t>
-            </a:r>
-          </a:p>
-          <a:p>
-            <a:pPr>
-              <a:spcAft>
-                <a:spcPts val="600"/>
-              </a:spcAft>
-            </a:pPr>
-            <a:r>
-              <a:rPr sz="1500">
-                <a:solidFill>
-                  <a:srgbClr val="22282E"/>
-                </a:solidFill>
-              </a:rPr>
-              <a:t>•  Historial inmutable: reescribir el pasado (rebase, filter) cambia hashes. Clave: un secreto ya empujado no se borra con solo eliminarlo en un commit nuevo.</a:t>
-            </a:r>
-          </a:p>
-          <a:p>
-            <a:pPr>
-              <a:spcAft>
-                <a:spcPts val="600"/>
-              </a:spcAft>
-            </a:pPr>
-            <a:r>
-              <a:rPr sz="1500">
-                <a:solidFill>
-                  <a:srgbClr val="22282E"/>
-                </a:solidFill>
-              </a:rPr>
-              <a:t>•  gitleaks/trufflehog: escáneres de secretos en repos. Clave: detectan claves y tokens en todo el historial.</a:t>
+              <a:t>•  La intuición equivocada más extendida es pensar que Git guarda las diferencias entre versiones. No: Git guarda snapshots completos del árbol de ficheros en cada commit, referenciados por un hash…</a:t>
+            </a:r>
+          </a:p>
+          <a:p>
+            <a:pPr>
+              <a:spcAft>
+                <a:spcPts val="600"/>
+              </a:spcAft>
+            </a:pPr>
+            <a:r>
+              <a:rPr sz="1500">
+                <a:solidFill>
+                  <a:srgbClr val="22282E"/>
+                </a:solidFill>
+              </a:rPr>
+              <a:t>•  Git organiza tu trabajo en tres zonas, y entenderlas evita la mayor parte de la confusión de un principiante. El directorio de trabajo son tus ficheros tal como los ves y editas. El área de staging…</a:t>
+            </a:r>
+          </a:p>
+          <a:p>
+            <a:pPr>
+              <a:spcAft>
+                <a:spcPts val="600"/>
+              </a:spcAft>
+            </a:pPr>
+            <a:r>
+              <a:rPr sz="1500">
+                <a:solidFill>
+                  <a:srgbClr val="22282E"/>
+                </a:solidFill>
+              </a:rPr>
+              <a:t>•  Una rama en Git no es una copia de los ficheros sino un simple puntero móvil a un commit; crear una rama es tan barato como escribir 41 bytes en un fichero. Eso hace que ramificar sea la operación…</a:t>
+            </a:r>
+          </a:p>
+          <a:p>
+            <a:pPr>
+              <a:spcAft>
+                <a:spcPts val="600"/>
+              </a:spcAft>
+            </a:pPr>
+            <a:r>
+              <a:rPr sz="1500">
+                <a:solidFill>
+                  <a:srgbClr val="22282E"/>
+                </a:solidFill>
+              </a:rPr>
+              <a:t>•  Un remoto es una copia del repositorio en otra máquina (GitHub, GitLab, un servidor propio) con la que sincronizas mediante push y pull. Git es distribuido: cada clone es una copia completa del…</a:t>
+            </a:r>
+          </a:p>
+          <a:p>
+            <a:pPr>
+              <a:spcAft>
+                <a:spcPts val="600"/>
+              </a:spcAft>
+            </a:pPr>
+            <a:r>
+              <a:rPr sz="1500">
+                <a:solidFill>
+                  <a:srgbClr val="22282E"/>
+                </a:solidFill>
+              </a:rPr>
+              <a:t>•  La prevención empieza con .gitignore, un fichero que lista patrones de rutas que Git no debe rastrear (.env, .pem, .key, venv/). Es la primera línea de defensa, aunque tiene un matiz: .gitignore solo…</a:t>
+            </a:r>
+          </a:p>
+          <a:p>
+            <a:pPr>
+              <a:spcAft>
+                <a:spcPts val="600"/>
+              </a:spcAft>
+            </a:pPr>
+            <a:r>
+              <a:rPr sz="1500">
+                <a:solidFill>
+                  <a:srgbClr val="22282E"/>
+                </a:solidFill>
+              </a:rPr>
+              <a:t>•  Fíjate en que rotar va primero: reescribir el historial es lento y no garantiza nada si alguien ya clonó el repo, mientras que rotar la clave la vuelve inútil de inmediato aunque el atacante la tenga.</a:t>
             </a:r>
           </a:p>
         </p:txBody>
@@ -4211,7 +4754,7 @@
                   <a:srgbClr val="0B3D2E"/>
                 </a:solidFill>
               </a:rPr>
-              <a:t>🧰 Herramientas y preparación</a:t>
+              <a:t>📖 Definiciones y características</a:t>
             </a:r>
           </a:p>
         </p:txBody>
@@ -4249,67 +4792,97 @@
                   <a:srgbClr val="22282E"/>
                 </a:solidFill>
               </a:rPr>
-              <a:t>•  Instala Git y configúralo:</a:t>
-            </a:r>
-          </a:p>
-          <a:p>
-            <a:pPr>
-              <a:spcAft>
-                <a:spcPts val="600"/>
-              </a:spcAft>
-            </a:pPr>
-            <a:r>
-              <a:rPr sz="1500">
-                <a:solidFill>
-                  <a:srgbClr val="22282E"/>
-                </a:solidFill>
-              </a:rPr>
-              <a:t>•  sudo apt install git</a:t>
-            </a:r>
-          </a:p>
-          <a:p>
-            <a:pPr>
-              <a:spcAft>
-                <a:spcPts val="600"/>
-              </a:spcAft>
-            </a:pPr>
-            <a:r>
-              <a:rPr sz="1500">
-                <a:solidFill>
-                  <a:srgbClr val="22282E"/>
-                </a:solidFill>
-              </a:rPr>
-              <a:t>•  git config --global user.name "Tu Nombre"</a:t>
-            </a:r>
-          </a:p>
-          <a:p>
-            <a:pPr>
-              <a:spcAft>
-                <a:spcPts val="600"/>
-              </a:spcAft>
-            </a:pPr>
-            <a:r>
-              <a:rPr sz="1500">
-                <a:solidFill>
-                  <a:srgbClr val="22282E"/>
-                </a:solidFill>
-              </a:rPr>
-              <a:t>•  git config --global user.email "tu@correo"</a:t>
-            </a:r>
-          </a:p>
-          <a:p>
-            <a:pPr>
-              <a:spcAft>
-                <a:spcPts val="600"/>
-              </a:spcAft>
-            </a:pPr>
-            <a:r>
-              <a:rPr sz="1500">
-                <a:solidFill>
-                  <a:srgbClr val="22282E"/>
-                </a:solidFill>
-              </a:rPr>
-              <a:t>•  Para escaneo de secretos, instala gitleaks (&lt;https://github.com/gitleaks/gitleaks&gt;). Opcional: una cuenta en GitHub/GitLab para practicar remotos. No ejecutes git en el repositorio del curso durante esta clase; usa un repo de práctica aparte.</a:t>
+              <a:t>•  Commit: instantánea completa del proyecto en un momento dado, identificada por un hash único e inmutable. Git guarda snapshots, no diferencias, y cada commit apunta a su padre formando la cadena del…</a:t>
+            </a:r>
+          </a:p>
+          <a:p>
+            <a:pPr>
+              <a:spcAft>
+                <a:spcPts val="600"/>
+              </a:spcAft>
+            </a:pPr>
+            <a:r>
+              <a:rPr sz="1500">
+                <a:solidFill>
+                  <a:srgbClr val="22282E"/>
+                </a:solidFill>
+              </a:rPr>
+              <a:t>•  Área de staging (índice): zona intermedia donde preparas qué cambios entrarán en el próximo commit. git add la llena y git diff --cached te deja revisarla antes de confirmar, un hábito clave para no…</a:t>
+            </a:r>
+          </a:p>
+          <a:p>
+            <a:pPr>
+              <a:spcAft>
+                <a:spcPts val="600"/>
+              </a:spcAft>
+            </a:pPr>
+            <a:r>
+              <a:rPr sz="1500">
+                <a:solidFill>
+                  <a:srgbClr val="22282E"/>
+                </a:solidFill>
+              </a:rPr>
+              <a:t>•  Rama (branch): puntero móvil y ligero a un commit. Aísla líneas de trabajo sin afectar a main, lo que permite experimentar con exploits o cambios arriesgados de forma segura.</a:t>
+            </a:r>
+          </a:p>
+          <a:p>
+            <a:pPr>
+              <a:spcAft>
+                <a:spcPts val="600"/>
+              </a:spcAft>
+            </a:pPr>
+            <a:r>
+              <a:rPr sz="1500">
+                <a:solidFill>
+                  <a:srgbClr val="22282E"/>
+                </a:solidFill>
+              </a:rPr>
+              <a:t>•  Merge: integración de una rama en otra. Es automática si las ramas tocaron líneas distintas y produce un conflicto si ambas modificaron la misma línea, que hay que resolver a mano.</a:t>
+            </a:r>
+          </a:p>
+          <a:p>
+            <a:pPr>
+              <a:spcAft>
+                <a:spcPts val="600"/>
+              </a:spcAft>
+            </a:pPr>
+            <a:r>
+              <a:rPr sz="1500">
+                <a:solidFill>
+                  <a:srgbClr val="22282E"/>
+                </a:solidFill>
+              </a:rPr>
+              <a:t>•  .gitignore: fichero con patrones de rutas que Git no debe rastrear. Es la primera defensa contra subir secretos y artefactos, pero solo afecta a ficheros aún no rastreados.</a:t>
+            </a:r>
+          </a:p>
+          <a:p>
+            <a:pPr>
+              <a:spcAft>
+                <a:spcPts val="600"/>
+              </a:spcAft>
+            </a:pPr>
+            <a:r>
+              <a:rPr sz="1500">
+                <a:solidFill>
+                  <a:srgbClr val="22282E"/>
+                </a:solidFill>
+              </a:rPr>
+              <a:t>•  Historial inmutable: cada commit es un objeto direccionado por contenido; reescribir el pasado (rebase, filter-repo) cambia los hashes. Un secreto ya empujado no desaparece por eliminarlo en un…</a:t>
+            </a:r>
+          </a:p>
+          <a:p>
+            <a:pPr>
+              <a:spcAft>
+                <a:spcPts val="600"/>
+              </a:spcAft>
+            </a:pPr>
+            <a:r>
+              <a:rPr sz="1500">
+                <a:solidFill>
+                  <a:srgbClr val="22282E"/>
+                </a:solidFill>
+              </a:rPr>
+              <a:t>•  Remoto: copia del repositorio en otra máquina con la que sincronizas por push/pull. Como Git es distribuido, cada clon incluye todo el historial, lo que agrava cualquier fuga.</a:t>
             </a:r>
           </a:p>
         </p:txBody>
@@ -4360,7 +4933,7 @@
                   <a:srgbClr val="0B3D2E"/>
                 </a:solidFill>
               </a:rPr>
-              <a:t>🧪 Laboratorio guiado</a:t>
+              <a:t>📔 Glosario</a:t>
             </a:r>
           </a:p>
         </p:txBody>
@@ -4398,97 +4971,97 @@
                   <a:srgbClr val="22282E"/>
                 </a:solidFill>
               </a:rPr>
-              <a:t>•  Crear un repo de práctica (fuera del repo del curso):</a:t>
-            </a:r>
-          </a:p>
-          <a:p>
-            <a:pPr>
-              <a:spcAft>
-                <a:spcPts val="600"/>
-              </a:spcAft>
-            </a:pPr>
-            <a:r>
-              <a:rPr sz="1500">
-                <a:solidFill>
-                  <a:srgbClr val="22282E"/>
-                </a:solidFill>
-              </a:rPr>
-              <a:t>•  mkdir ~/practica-git &amp;&amp; cd ~/practica-git &amp;&amp; git init</a:t>
-            </a:r>
-          </a:p>
-          <a:p>
-            <a:pPr>
-              <a:spcAft>
-                <a:spcPts val="600"/>
-              </a:spcAft>
-            </a:pPr>
-            <a:r>
-              <a:rPr sz="1500">
-                <a:solidFill>
-                  <a:srgbClr val="22282E"/>
-                </a:solidFill>
-              </a:rPr>
-              <a:t>•  Flujo básico:</a:t>
-            </a:r>
-          </a:p>
-          <a:p>
-            <a:pPr>
-              <a:spcAft>
-                <a:spcPts val="600"/>
-              </a:spcAft>
-            </a:pPr>
-            <a:r>
-              <a:rPr sz="1500">
-                <a:solidFill>
-                  <a:srgbClr val="22282E"/>
-                </a:solidFill>
-              </a:rPr>
-              <a:t>•  echo "# Notas" &gt; README.md</a:t>
-            </a:r>
-          </a:p>
-          <a:p>
-            <a:pPr>
-              <a:spcAft>
-                <a:spcPts val="600"/>
-              </a:spcAft>
-            </a:pPr>
-            <a:r>
-              <a:rPr sz="1500">
-                <a:solidFill>
-                  <a:srgbClr val="22282E"/>
-                </a:solidFill>
-              </a:rPr>
-              <a:t>•  git add README.md &amp;&amp; git commit -m "Primer commit"</a:t>
-            </a:r>
-          </a:p>
-          <a:p>
-            <a:pPr>
-              <a:spcAft>
-                <a:spcPts val="600"/>
-              </a:spcAft>
-            </a:pPr>
-            <a:r>
-              <a:rPr sz="1500">
-                <a:solidFill>
-                  <a:srgbClr val="22282E"/>
-                </a:solidFill>
-              </a:rPr>
-              <a:t>•  git log --oneline</a:t>
-            </a:r>
-          </a:p>
-          <a:p>
-            <a:pPr>
-              <a:spcAft>
-                <a:spcPts val="600"/>
-              </a:spcAft>
-            </a:pPr>
-            <a:r>
-              <a:rPr sz="1500">
-                <a:solidFill>
-                  <a:srgbClr val="22282E"/>
-                </a:solidFill>
-              </a:rPr>
-              <a:t>•  Ramas y conflicto controlado. Crea una rama, edita la misma línea en ambas y fuerza un conflicto al hacer merge; resuélvelo manualmente.</a:t>
+              <a:t>•  Término — Definición concisa</a:t>
+            </a:r>
+          </a:p>
+          <a:p>
+            <a:pPr>
+              <a:spcAft>
+                <a:spcPts val="600"/>
+              </a:spcAft>
+            </a:pPr>
+            <a:r>
+              <a:rPr sz="1500">
+                <a:solidFill>
+                  <a:srgbClr val="22282E"/>
+                </a:solidFill>
+              </a:rPr>
+              <a:t>•  Commit — Snapshot inmutable del proyecto con hash único</a:t>
+            </a:r>
+          </a:p>
+          <a:p>
+            <a:pPr>
+              <a:spcAft>
+                <a:spcPts val="600"/>
+              </a:spcAft>
+            </a:pPr>
+            <a:r>
+              <a:rPr sz="1500">
+                <a:solidFill>
+                  <a:srgbClr val="22282E"/>
+                </a:solidFill>
+              </a:rPr>
+              <a:t>•  Hash SHA — Identificador de contenido de un objeto Git</a:t>
+            </a:r>
+          </a:p>
+          <a:p>
+            <a:pPr>
+              <a:spcAft>
+                <a:spcPts val="600"/>
+              </a:spcAft>
+            </a:pPr>
+            <a:r>
+              <a:rPr sz="1500">
+                <a:solidFill>
+                  <a:srgbClr val="22282E"/>
+                </a:solidFill>
+              </a:rPr>
+              <a:t>•  Staging (índice) — Zona intermedia de cambios preparados</a:t>
+            </a:r>
+          </a:p>
+          <a:p>
+            <a:pPr>
+              <a:spcAft>
+                <a:spcPts val="600"/>
+              </a:spcAft>
+            </a:pPr>
+            <a:r>
+              <a:rPr sz="1500">
+                <a:solidFill>
+                  <a:srgbClr val="22282E"/>
+                </a:solidFill>
+              </a:rPr>
+              <a:t>•  git add — Mueve cambios al área de staging</a:t>
+            </a:r>
+          </a:p>
+          <a:p>
+            <a:pPr>
+              <a:spcAft>
+                <a:spcPts val="600"/>
+              </a:spcAft>
+            </a:pPr>
+            <a:r>
+              <a:rPr sz="1500">
+                <a:solidFill>
+                  <a:srgbClr val="22282E"/>
+                </a:solidFill>
+              </a:rPr>
+              <a:t>•  Rama — Puntero móvil a un commit</a:t>
+            </a:r>
+          </a:p>
+          <a:p>
+            <a:pPr>
+              <a:spcAft>
+                <a:spcPts val="600"/>
+              </a:spcAft>
+            </a:pPr>
+            <a:r>
+              <a:rPr sz="1500">
+                <a:solidFill>
+                  <a:srgbClr val="22282E"/>
+                </a:solidFill>
+              </a:rPr>
+              <a:t>•  main — Rama principal por convención</a:t>
             </a:r>
           </a:p>
         </p:txBody>
@@ -4539,7 +5112,7 @@
                   <a:srgbClr val="0B3D2E"/>
                 </a:solidFill>
               </a:rPr>
-              <a:t>✍️ Ejercicios</a:t>
+              <a:t>🧰 Herramientas y preparación</a:t>
             </a:r>
           </a:p>
         </p:txBody>
@@ -4577,82 +5150,22 @@
                   <a:srgbClr val="22282E"/>
                 </a:solidFill>
               </a:rPr>
-              <a:t>•  Crea, cambia entre y fusiona tres ramas, documentando cada paso.</a:t>
-            </a:r>
-          </a:p>
-          <a:p>
-            <a:pPr>
-              <a:spcAft>
-                <a:spcPts val="600"/>
-              </a:spcAft>
-            </a:pPr>
-            <a:r>
-              <a:rPr sz="1500">
-                <a:solidFill>
-                  <a:srgbClr val="22282E"/>
-                </a:solidFill>
-              </a:rPr>
-              <a:t>•  Provoca y resuelve un conflicto de merge en un archivo con dos ediciones.</a:t>
-            </a:r>
-          </a:p>
-          <a:p>
-            <a:pPr>
-              <a:spcAft>
-                <a:spcPts val="600"/>
-              </a:spcAft>
-            </a:pPr>
-            <a:r>
-              <a:rPr sz="1500">
-                <a:solidFill>
-                  <a:srgbClr val="22282E"/>
-                </a:solidFill>
-              </a:rPr>
-              <a:t>•  Escribe un .gitignore completo para un proyecto Python de seguridad.</a:t>
-            </a:r>
-          </a:p>
-          <a:p>
-            <a:pPr>
-              <a:spcAft>
-                <a:spcPts val="600"/>
-              </a:spcAft>
-            </a:pPr>
-            <a:r>
-              <a:rPr sz="1500">
-                <a:solidFill>
-                  <a:srgbClr val="22282E"/>
-                </a:solidFill>
-              </a:rPr>
-              <a:t>•  Usa git log, git diff y git blame para investigar quién y cuándo cambió una línea.</a:t>
-            </a:r>
-          </a:p>
-          <a:p>
-            <a:pPr>
-              <a:spcAft>
-                <a:spcPts val="600"/>
-              </a:spcAft>
-            </a:pPr>
-            <a:r>
-              <a:rPr sz="1500">
-                <a:solidFill>
-                  <a:srgbClr val="22282E"/>
-                </a:solidFill>
-              </a:rPr>
-              <a:t>•  Ejecuta gitleaks sobre un repo con un secreto plantado y explica el hallazgo.</a:t>
-            </a:r>
-          </a:p>
-          <a:p>
-            <a:pPr>
-              <a:spcAft>
-                <a:spcPts val="600"/>
-              </a:spcAft>
-            </a:pPr>
-            <a:r>
-              <a:rPr sz="1500">
-                <a:solidFill>
-                  <a:srgbClr val="22282E"/>
-                </a:solidFill>
-              </a:rPr>
-              <a:t>•  Investiga cómo eliminar un secreto del historial (git filter-repo/BFG) y por qué además hay que rotarlo.</a:t>
+              <a:t>•  Instala Git y configúralo con tu identidad:</a:t>
+            </a:r>
+          </a:p>
+          <a:p>
+            <a:pPr>
+              <a:spcAft>
+                <a:spcPts val="600"/>
+              </a:spcAft>
+            </a:pPr>
+            <a:r>
+              <a:rPr sz="1500">
+                <a:solidFill>
+                  <a:srgbClr val="22282E"/>
+                </a:solidFill>
+              </a:rPr>
+              <a:t>•  Para el escaneo de secretos, instala gitleaks (&lt;https://github.com/gitleaks/gitleaks&gt;). Opcionalmente, crea una cuenta en GitHub o GitLab para practicar los remotos. Importante: no ejecutes los…</a:t>
             </a:r>
           </a:p>
         </p:txBody>
@@ -4703,7 +5216,7 @@
                   <a:srgbClr val="0B3D2E"/>
                 </a:solidFill>
               </a:rPr>
-              <a:t>📝 Reto verificable</a:t>
+              <a:t>🧪 Laboratorio guiado</a:t>
             </a:r>
           </a:p>
         </p:txBody>
@@ -4741,22 +5254,97 @@
                   <a:srgbClr val="22282E"/>
                 </a:solidFill>
               </a:rPr>
-              <a:t>•  Crea un repositorio de práctica, simula la fuga de un secreto (clave ficticia) en un commit, detéctalo con gitleaks, y documenta el procedimiento correcto de remediación: eliminación del historial y rotación de la credencial. Añade un .gitignore que habría prevenido la fuga.</a:t>
-            </a:r>
-          </a:p>
-          <a:p>
-            <a:pPr>
-              <a:spcAft>
-                <a:spcPts val="600"/>
-              </a:spcAft>
-            </a:pPr>
-            <a:r>
-              <a:rPr sz="1500">
-                <a:solidFill>
-                  <a:srgbClr val="22282E"/>
-                </a:solidFill>
-              </a:rPr>
-              <a:t>•  Criterio de aceptación: gitleaks detecta el secreto plantado en el historial; tu .gitignore incluye el patrón que lo habría bloqueado; y tu documento explica por qué "borrar el archivo en un commit posterior" es insuficiente y qué se hace en su lugar. Reproducible en un repo limpio.</a:t>
+              <a:t>•  Crear un repo de práctica (fuera del repo del curso):</a:t>
+            </a:r>
+          </a:p>
+          <a:p>
+            <a:pPr>
+              <a:spcAft>
+                <a:spcPts val="600"/>
+              </a:spcAft>
+            </a:pPr>
+            <a:r>
+              <a:rPr sz="1500">
+                <a:solidFill>
+                  <a:srgbClr val="22282E"/>
+                </a:solidFill>
+              </a:rPr>
+              <a:t>•  Flujo básico y revisión del staging:</a:t>
+            </a:r>
+          </a:p>
+          <a:p>
+            <a:pPr>
+              <a:spcAft>
+                <a:spcPts val="600"/>
+              </a:spcAft>
+            </a:pPr>
+            <a:r>
+              <a:rPr sz="1500">
+                <a:solidFill>
+                  <a:srgbClr val="22282E"/>
+                </a:solidFill>
+              </a:rPr>
+              <a:t>•  Ramas y conflicto controlado. Crea una rama, edita la misma línea del README en ambas ramas y fuerza un conflicto al fusionar; resuélvelo editando los marcadores y confirmando.</a:t>
+            </a:r>
+          </a:p>
+          <a:p>
+            <a:pPr>
+              <a:spcAft>
+                <a:spcPts val="600"/>
+              </a:spcAft>
+            </a:pPr>
+            <a:r>
+              <a:rPr sz="1500">
+                <a:solidFill>
+                  <a:srgbClr val="22282E"/>
+                </a:solidFill>
+              </a:rPr>
+              <a:t>•  .gitignore con patrones típicos de secretos y artefactos:</a:t>
+            </a:r>
+          </a:p>
+          <a:p>
+            <a:pPr>
+              <a:spcAft>
+                <a:spcPts val="600"/>
+              </a:spcAft>
+            </a:pPr>
+            <a:r>
+              <a:rPr sz="1500">
+                <a:solidFill>
+                  <a:srgbClr val="22282E"/>
+                </a:solidFill>
+              </a:rPr>
+              <a:t>•  Simular una fuga. Crea un fichero secreto.env con una clave falsa, añádelo por error y haz commit. Comprueba que aparece en git log -p.</a:t>
+            </a:r>
+          </a:p>
+          <a:p>
+            <a:pPr>
+              <a:spcAft>
+                <a:spcPts val="600"/>
+              </a:spcAft>
+            </a:pPr>
+            <a:r>
+              <a:rPr sz="1500">
+                <a:solidFill>
+                  <a:srgbClr val="22282E"/>
+                </a:solidFill>
+              </a:rPr>
+              <a:t>•  Auditar con gitleaks:</a:t>
+            </a:r>
+          </a:p>
+          <a:p>
+            <a:pPr>
+              <a:spcAft>
+                <a:spcPts val="600"/>
+              </a:spcAft>
+            </a:pPr>
+            <a:r>
+              <a:rPr sz="1500">
+                <a:solidFill>
+                  <a:srgbClr val="22282E"/>
+                </a:solidFill>
+              </a:rPr>
+              <a:t>•  Observa cómo detecta el secreto plantado en el historial.</a:t>
             </a:r>
           </a:p>
         </p:txBody>
